--- a/Presentation.pptx
+++ b/Presentation.pptx
@@ -1330,7 +1330,7 @@
           <a:p>
             <a:fld id="{E0F4EE6A-9A91-4AF6-9C0C-4704A379C61A}" type="datetimeFigureOut">
               <a:rPr lang="en-GB" smtClean="0"/>
-              <a:t>01/10/2026</a:t>
+              <a:t>03/10/2026</a:t>
             </a:fld>
             <a:endParaRPr lang="en-GB"/>
           </a:p>
@@ -1828,7 +1828,7 @@
           <a:p>
             <a:fld id="{7A521B74-1ACB-4959-AF83-A17C9CB9EC35}" type="datetimeFigureOut">
               <a:rPr lang="en-GB" smtClean="0"/>
-              <a:t>01/10/2026</a:t>
+              <a:t>03/10/2026</a:t>
             </a:fld>
             <a:endParaRPr lang="en-GB"/>
           </a:p>
@@ -2026,7 +2026,7 @@
           <a:p>
             <a:fld id="{7A521B74-1ACB-4959-AF83-A17C9CB9EC35}" type="datetimeFigureOut">
               <a:rPr lang="en-GB" smtClean="0"/>
-              <a:t>01/10/2026</a:t>
+              <a:t>03/10/2026</a:t>
             </a:fld>
             <a:endParaRPr lang="en-GB"/>
           </a:p>
@@ -2234,7 +2234,7 @@
           <a:p>
             <a:fld id="{7A521B74-1ACB-4959-AF83-A17C9CB9EC35}" type="datetimeFigureOut">
               <a:rPr lang="en-GB" smtClean="0"/>
-              <a:t>01/10/2026</a:t>
+              <a:t>03/10/2026</a:t>
             </a:fld>
             <a:endParaRPr lang="en-GB"/>
           </a:p>
@@ -2432,7 +2432,7 @@
           <a:p>
             <a:fld id="{7A521B74-1ACB-4959-AF83-A17C9CB9EC35}" type="datetimeFigureOut">
               <a:rPr lang="en-GB" smtClean="0"/>
-              <a:t>01/10/2026</a:t>
+              <a:t>03/10/2026</a:t>
             </a:fld>
             <a:endParaRPr lang="en-GB"/>
           </a:p>
@@ -2707,7 +2707,7 @@
           <a:p>
             <a:fld id="{7A521B74-1ACB-4959-AF83-A17C9CB9EC35}" type="datetimeFigureOut">
               <a:rPr lang="en-GB" smtClean="0"/>
-              <a:t>01/10/2026</a:t>
+              <a:t>03/10/2026</a:t>
             </a:fld>
             <a:endParaRPr lang="en-GB"/>
           </a:p>
@@ -2972,7 +2972,7 @@
           <a:p>
             <a:fld id="{7A521B74-1ACB-4959-AF83-A17C9CB9EC35}" type="datetimeFigureOut">
               <a:rPr lang="en-GB" smtClean="0"/>
-              <a:t>01/10/2026</a:t>
+              <a:t>03/10/2026</a:t>
             </a:fld>
             <a:endParaRPr lang="en-GB"/>
           </a:p>
@@ -3384,7 +3384,7 @@
           <a:p>
             <a:fld id="{7A521B74-1ACB-4959-AF83-A17C9CB9EC35}" type="datetimeFigureOut">
               <a:rPr lang="en-GB" smtClean="0"/>
-              <a:t>01/10/2026</a:t>
+              <a:t>03/10/2026</a:t>
             </a:fld>
             <a:endParaRPr lang="en-GB"/>
           </a:p>
@@ -3525,7 +3525,7 @@
           <a:p>
             <a:fld id="{7A521B74-1ACB-4959-AF83-A17C9CB9EC35}" type="datetimeFigureOut">
               <a:rPr lang="en-GB" smtClean="0"/>
-              <a:t>01/10/2026</a:t>
+              <a:t>03/10/2026</a:t>
             </a:fld>
             <a:endParaRPr lang="en-GB"/>
           </a:p>
@@ -3638,7 +3638,7 @@
           <a:p>
             <a:fld id="{7A521B74-1ACB-4959-AF83-A17C9CB9EC35}" type="datetimeFigureOut">
               <a:rPr lang="en-GB" smtClean="0"/>
-              <a:t>01/10/2026</a:t>
+              <a:t>03/10/2026</a:t>
             </a:fld>
             <a:endParaRPr lang="en-GB"/>
           </a:p>
@@ -3949,7 +3949,7 @@
           <a:p>
             <a:fld id="{7A521B74-1ACB-4959-AF83-A17C9CB9EC35}" type="datetimeFigureOut">
               <a:rPr lang="en-GB" smtClean="0"/>
-              <a:t>01/10/2026</a:t>
+              <a:t>03/10/2026</a:t>
             </a:fld>
             <a:endParaRPr lang="en-GB"/>
           </a:p>
@@ -4237,7 +4237,7 @@
           <a:p>
             <a:fld id="{7A521B74-1ACB-4959-AF83-A17C9CB9EC35}" type="datetimeFigureOut">
               <a:rPr lang="en-GB" smtClean="0"/>
-              <a:t>01/10/2026</a:t>
+              <a:t>03/10/2026</a:t>
             </a:fld>
             <a:endParaRPr lang="en-GB"/>
           </a:p>
@@ -4478,7 +4478,7 @@
           <a:p>
             <a:fld id="{7A521B74-1ACB-4959-AF83-A17C9CB9EC35}" type="datetimeFigureOut">
               <a:rPr lang="en-GB" smtClean="0"/>
-              <a:t>01/10/2026</a:t>
+              <a:t>03/10/2026</a:t>
             </a:fld>
             <a:endParaRPr lang="en-GB"/>
           </a:p>
@@ -4985,7 +4985,7 @@
                 <a:latin typeface="Times New Roman" panose="02020603050405020304" pitchFamily="18" charset="0"/>
                 <a:cs typeface="Times New Roman" panose="02020603050405020304" pitchFamily="18" charset="0"/>
               </a:rPr>
-              <a:t>09/2026</a:t>
+              <a:t>10/2026</a:t>
             </a:r>
             <a:endParaRPr lang="en-GB" sz="3200" b="1" dirty="0">
               <a:latin typeface="Times New Roman" panose="02020603050405020304" pitchFamily="18" charset="0"/>
@@ -5497,7 +5497,7 @@
         <p:spPr>
           <a:xfrm>
             <a:off x="838200" y="5806440"/>
-            <a:ext cx="4265848" cy="369332"/>
+            <a:ext cx="3730508" cy="369332"/>
           </a:xfrm>
           <a:prstGeom prst="rect">
             <a:avLst/>
@@ -5522,7 +5522,7 @@
                 <a:latin typeface="Times New Roman" panose="02020603050405020304" pitchFamily="18" charset="0"/>
                 <a:cs typeface="Times New Roman" panose="02020603050405020304" pitchFamily="18" charset="0"/>
               </a:rPr>
-              <a:t>ekremturanfirat</a:t>
+              <a:t>odtu</a:t>
             </a:r>
             <a:r>
               <a:rPr lang="en-GB" dirty="0">
@@ -5536,7 +5536,7 @@
                 <a:latin typeface="Times New Roman" panose="02020603050405020304" pitchFamily="18" charset="0"/>
                 <a:cs typeface="Times New Roman" panose="02020603050405020304" pitchFamily="18" charset="0"/>
               </a:rPr>
-              <a:t>ClaudeTestPCB</a:t>
+              <a:t>PCBDesignWClaude</a:t>
             </a:r>
             <a:endParaRPr lang="en-GB" dirty="0">
               <a:latin typeface="Times New Roman" panose="02020603050405020304" pitchFamily="18" charset="0"/>
@@ -10403,14 +10403,10 @@
           </a:bodyPr>
           <a:lstStyle/>
           <a:p>
-            <a:pPr marL="0" indent="0" algn="ctr">
-              <a:spcBef>
-                <a:spcPts val="0"/>
-              </a:spcBef>
+            <a:pPr algn="ctr">
               <a:spcAft>
                 <a:spcPts val="400"/>
               </a:spcAft>
-              <a:buNone/>
             </a:pPr>
             <a:r>
               <a:rPr lang="en-GB" sz="1600" dirty="0">
@@ -10420,19 +10416,47 @@
                 <a:latin typeface="Times New Roman"/>
                 <a:cs typeface="Times New Roman"/>
               </a:rPr>
-              <a:t>github.com/ekremturanfirat/ClaudeTestPCB</a:t>
-            </a:r>
-          </a:p>
-          <a:p>
-            <a:pPr marL="0" indent="0" algn="ctr">
-              <a:spcBef>
-                <a:spcPts val="0"/>
-              </a:spcBef>
-              <a:spcAft>
-                <a:spcPts val="0"/>
-              </a:spcAft>
-              <a:buNone/>
-            </a:pPr>
+              <a:t>github.com/</a:t>
+            </a:r>
+            <a:r>
+              <a:rPr lang="en-GB" sz="1600" dirty="0" err="1">
+                <a:solidFill>
+                  <a:srgbClr val="1F1F1F"/>
+                </a:solidFill>
+                <a:latin typeface="Times New Roman"/>
+                <a:cs typeface="Times New Roman"/>
+              </a:rPr>
+              <a:t>odtu</a:t>
+            </a:r>
+            <a:r>
+              <a:rPr lang="en-GB" sz="1600" dirty="0">
+                <a:solidFill>
+                  <a:srgbClr val="1F1F1F"/>
+                </a:solidFill>
+                <a:latin typeface="Times New Roman"/>
+                <a:cs typeface="Times New Roman"/>
+              </a:rPr>
+              <a:t>/</a:t>
+            </a:r>
+            <a:r>
+              <a:rPr lang="en-GB" sz="1600" dirty="0" err="1">
+                <a:solidFill>
+                  <a:srgbClr val="1F1F1F"/>
+                </a:solidFill>
+                <a:latin typeface="Times New Roman"/>
+                <a:cs typeface="Times New Roman"/>
+              </a:rPr>
+              <a:t>PCBDesignWClaude</a:t>
+            </a:r>
+            <a:br>
+              <a:rPr lang="en-GB" sz="1600" dirty="0">
+                <a:solidFill>
+                  <a:srgbClr val="1F1F1F"/>
+                </a:solidFill>
+                <a:latin typeface="Times New Roman"/>
+                <a:cs typeface="Times New Roman"/>
+              </a:rPr>
+            </a:br>
             <a:r>
               <a:rPr lang="en-GB" sz="1600" dirty="0">
                 <a:solidFill>
